--- a/builder/assets/reference-pages/tornado-sensitivity.pptx
+++ b/builder/assets/reference-pages/tornado-sensitivity.pptx
@@ -1097,7 +1097,7 @@
                   <a:srgbClr val="15375F"/>
                 </a:solidFill>
               </a:rPr>
-              <a:t>结果的 70% 波动来自两个变量，其余六个可暂不纳入管控</a:t>
+              <a:t>Resultant 70% The fluctuation comes from two variables, and the remaining six can not be controlled for the time being.</a:t>
             </a:r>
           </a:p>
         </p:txBody>
@@ -1213,7 +1213,7 @@
                   <a:srgbClr val="15375F"/>
                 </a:solidFill>
               </a:rPr>
-              <a:t>基准 100</a:t>
+              <a:t>benchmark 100</a:t>
             </a:r>
           </a:p>
         </p:txBody>
@@ -1294,7 +1294,7 @@
                   <a:srgbClr val="172033"/>
                 </a:solidFill>
               </a:rPr>
-              <a:t>价格实现率</a:t>
+              <a:t>price realization rate</a:t>
             </a:r>
           </a:p>
           <a:p xmlns:a="http://schemas.openxmlformats.org/drawingml/2006/main">
@@ -1527,7 +1527,7 @@
                   <a:srgbClr val="172033"/>
                 </a:solidFill>
               </a:rPr>
-              <a:t>可控性 高</a:t>
+              <a:t>Controllability high</a:t>
             </a:r>
           </a:p>
           <a:p xmlns:a="http://schemas.openxmlformats.org/drawingml/2006/main">
@@ -1544,7 +1544,7 @@
                   <a:srgbClr val="172033"/>
                 </a:solidFill>
               </a:rPr>
-              <a:t>置信度 强</a:t>
+              <a:t>Confidence Strong</a:t>
             </a:r>
           </a:p>
         </p:txBody>
@@ -1625,7 +1625,7 @@
                   <a:srgbClr val="172033"/>
                 </a:solidFill>
               </a:rPr>
-              <a:t>销量增速</a:t>
+              <a:t>Sales growth</a:t>
             </a:r>
           </a:p>
           <a:p xmlns:a="http://schemas.openxmlformats.org/drawingml/2006/main">
@@ -1858,7 +1858,7 @@
                   <a:srgbClr val="172033"/>
                 </a:solidFill>
               </a:rPr>
-              <a:t>可控性 中</a:t>
+              <a:t>Controllability in</a:t>
             </a:r>
           </a:p>
           <a:p xmlns:a="http://schemas.openxmlformats.org/drawingml/2006/main">
@@ -1875,7 +1875,7 @@
                   <a:srgbClr val="172033"/>
                 </a:solidFill>
               </a:rPr>
-              <a:t>置信度 强</a:t>
+              <a:t>Confidence Strong</a:t>
             </a:r>
           </a:p>
         </p:txBody>
@@ -1925,7 +1925,7 @@
                   <a:srgbClr val="172033"/>
                 </a:solidFill>
               </a:rPr>
-              <a:t>产品组合</a:t>
+              <a:t>product portfolio</a:t>
             </a:r>
           </a:p>
           <a:p xmlns:a="http://schemas.openxmlformats.org/drawingml/2006/main">
@@ -1942,7 +1942,7 @@
                   <a:srgbClr val="172033"/>
                 </a:solidFill>
               </a:rPr>
-              <a:t>低 / 基准 / 高</a:t>
+              <a:t>low / benchmark / high</a:t>
             </a:r>
           </a:p>
         </p:txBody>
@@ -2158,7 +2158,7 @@
                   <a:srgbClr val="172033"/>
                 </a:solidFill>
               </a:rPr>
-              <a:t>可控性 中</a:t>
+              <a:t>Controllability in</a:t>
             </a:r>
           </a:p>
           <a:p xmlns:a="http://schemas.openxmlformats.org/drawingml/2006/main">
@@ -2175,7 +2175,7 @@
                   <a:srgbClr val="172033"/>
                 </a:solidFill>
               </a:rPr>
-              <a:t>置信度 中</a:t>
+              <a:t>Confidence in</a:t>
             </a:r>
           </a:p>
         </p:txBody>
@@ -2225,7 +2225,7 @@
                   <a:srgbClr val="172033"/>
                 </a:solidFill>
               </a:rPr>
-              <a:t>人工成本</a:t>
+              <a:t>Labor cost</a:t>
             </a:r>
           </a:p>
           <a:p xmlns:a="http://schemas.openxmlformats.org/drawingml/2006/main">
@@ -2458,7 +2458,7 @@
                   <a:srgbClr val="172033"/>
                 </a:solidFill>
               </a:rPr>
-              <a:t>可控性 高</a:t>
+              <a:t>Controllability high</a:t>
             </a:r>
           </a:p>
           <a:p xmlns:a="http://schemas.openxmlformats.org/drawingml/2006/main">
@@ -2475,7 +2475,7 @@
                   <a:srgbClr val="172033"/>
                 </a:solidFill>
               </a:rPr>
-              <a:t>置信度 强</a:t>
+              <a:t>Confidence Strong</a:t>
             </a:r>
           </a:p>
         </p:txBody>
@@ -2525,7 +2525,7 @@
                   <a:srgbClr val="172033"/>
                 </a:solidFill>
               </a:rPr>
-              <a:t>原料价格</a:t>
+              <a:t>Raw material price</a:t>
             </a:r>
           </a:p>
           <a:p xmlns:a="http://schemas.openxmlformats.org/drawingml/2006/main">
@@ -2758,7 +2758,7 @@
                   <a:srgbClr val="172033"/>
                 </a:solidFill>
               </a:rPr>
-              <a:t>可控性 低</a:t>
+              <a:t>Controllability low</a:t>
             </a:r>
           </a:p>
           <a:p xmlns:a="http://schemas.openxmlformats.org/drawingml/2006/main">
@@ -2775,7 +2775,7 @@
                   <a:srgbClr val="172033"/>
                 </a:solidFill>
               </a:rPr>
-              <a:t>置信度 中</a:t>
+              <a:t>Confidence in</a:t>
             </a:r>
           </a:p>
         </p:txBody>
@@ -2825,7 +2825,7 @@
                   <a:srgbClr val="172033"/>
                 </a:solidFill>
               </a:rPr>
-              <a:t>汇率</a:t>
+              <a:t>exchange rate</a:t>
             </a:r>
           </a:p>
           <a:p xmlns:a="http://schemas.openxmlformats.org/drawingml/2006/main">
@@ -3058,7 +3058,7 @@
                   <a:srgbClr val="172033"/>
                 </a:solidFill>
               </a:rPr>
-              <a:t>可控性 低</a:t>
+              <a:t>Controllability low</a:t>
             </a:r>
           </a:p>
           <a:p xmlns:a="http://schemas.openxmlformats.org/drawingml/2006/main">
@@ -3075,7 +3075,7 @@
                   <a:srgbClr val="172033"/>
                 </a:solidFill>
               </a:rPr>
-              <a:t>置信度 中</a:t>
+              <a:t>Confidence in</a:t>
             </a:r>
           </a:p>
         </p:txBody>
@@ -3125,7 +3125,7 @@
                   <a:srgbClr val="172033"/>
                 </a:solidFill>
               </a:rPr>
-              <a:t>税率</a:t>
+              <a:t>tax rate</a:t>
             </a:r>
           </a:p>
           <a:p xmlns:a="http://schemas.openxmlformats.org/drawingml/2006/main">
@@ -3358,7 +3358,7 @@
                   <a:srgbClr val="172033"/>
                 </a:solidFill>
               </a:rPr>
-              <a:t>可控性 低</a:t>
+              <a:t>Controllability low</a:t>
             </a:r>
           </a:p>
           <a:p xmlns:a="http://schemas.openxmlformats.org/drawingml/2006/main">
@@ -3375,7 +3375,7 @@
                   <a:srgbClr val="172033"/>
                 </a:solidFill>
               </a:rPr>
-              <a:t>置信度 强</a:t>
+              <a:t>Confidence Strong</a:t>
             </a:r>
           </a:p>
         </p:txBody>
@@ -3425,7 +3425,7 @@
                   <a:srgbClr val="172033"/>
                 </a:solidFill>
               </a:rPr>
-              <a:t>管理费用</a:t>
+              <a:t>overhead</a:t>
             </a:r>
           </a:p>
           <a:p xmlns:a="http://schemas.openxmlformats.org/drawingml/2006/main">
@@ -3658,7 +3658,7 @@
                   <a:srgbClr val="172033"/>
                 </a:solidFill>
               </a:rPr>
-              <a:t>可控性 高</a:t>
+              <a:t>Controllability high</a:t>
             </a:r>
           </a:p>
           <a:p xmlns:a="http://schemas.openxmlformats.org/drawingml/2006/main">
@@ -3675,7 +3675,7 @@
                   <a:srgbClr val="172033"/>
                 </a:solidFill>
               </a:rPr>
-              <a:t>置信度 弱</a:t>
+              <a:t>Confidence weak</a:t>
             </a:r>
           </a:p>
         </p:txBody>
@@ -3899,7 +3899,7 @@
       </p:sp>
       <p:sp>
         <p:nvSpPr>
-          <p:cNvPr id="62" name="关键洞察-rail">
+          <p:cNvPr id="62" name="key insights-rail">
             <a:extLst xmlns:a="http://schemas.openxmlformats.org/drawingml/2006/main">
               <a:ext uri="{FF2B5EF4-FFF2-40B4-BE49-F238E27FC236}">
                 <a16:creationId xmlns:a16="http://schemas.microsoft.com/office/drawing/2014/main" id="{BFF646D5-FCDE-405A-BB4C-315A882F63C1}"/>
@@ -3934,7 +3934,7 @@
       </p:sp>
       <p:sp>
         <p:nvSpPr>
-          <p:cNvPr id="63" name="关键洞察-title">
+          <p:cNvPr id="63" name="key insights-title">
             <a:extLst xmlns:a="http://schemas.openxmlformats.org/drawingml/2006/main">
               <a:ext uri="{FF2B5EF4-FFF2-40B4-BE49-F238E27FC236}">
                 <a16:creationId xmlns:a16="http://schemas.microsoft.com/office/drawing/2014/main" id="{5314A413-5B84-44CF-AAB7-4B9C4D0C607F}"/>
@@ -3977,14 +3977,14 @@
                   <a:srgbClr val="15375F"/>
                 </a:solidFill>
               </a:rPr>
-              <a:t>关键洞察</a:t>
-            </a:r>
-          </a:p>
-        </p:txBody>
-      </p:sp>
-      <p:sp>
-        <p:nvSpPr>
-          <p:cNvPr id="64" name="关键洞察-item-1">
+              <a:t>key insights</a:t>
+            </a:r>
+          </a:p>
+        </p:txBody>
+      </p:sp>
+      <p:sp>
+        <p:nvSpPr>
+          <p:cNvPr id="64" name="key insights-item-1">
             <a:extLst xmlns:a="http://schemas.openxmlformats.org/drawingml/2006/main">
               <a:ext uri="{FF2B5EF4-FFF2-40B4-BE49-F238E27FC236}">
                 <a16:creationId xmlns:a16="http://schemas.microsoft.com/office/drawing/2014/main" id="{A9BAF697-37FE-47FB-BA0C-04A41384008B}"/>
@@ -4033,14 +4033,14 @@
                   <a:srgbClr val="172033"/>
                 </a:solidFill>
               </a:rPr>
-              <a:t>价格实现率是首要敏感变量</a:t>
-            </a:r>
-          </a:p>
-        </p:txBody>
-      </p:sp>
-      <p:sp>
-        <p:nvSpPr>
-          <p:cNvPr id="65" name="关键洞察-item-2">
+              <a:t>Price realization rate is the primary sensitive variable</a:t>
+            </a:r>
+          </a:p>
+        </p:txBody>
+      </p:sp>
+      <p:sp>
+        <p:nvSpPr>
+          <p:cNvPr id="65" name="key insights-item-2">
             <a:extLst xmlns:a="http://schemas.openxmlformats.org/drawingml/2006/main">
               <a:ext uri="{FF2B5EF4-FFF2-40B4-BE49-F238E27FC236}">
                 <a16:creationId xmlns:a16="http://schemas.microsoft.com/office/drawing/2014/main" id="{4561A02C-8760-44B7-8372-5551BE0E2739}"/>
@@ -4089,14 +4089,14 @@
                   <a:srgbClr val="172033"/>
                 </a:solidFill>
               </a:rPr>
-              <a:t>销量增速与价格共同解释 70% 波动</a:t>
-            </a:r>
-          </a:p>
-        </p:txBody>
-      </p:sp>
-      <p:sp>
-        <p:nvSpPr>
-          <p:cNvPr id="66" name="关键洞察-item-3">
+              <a:t>Sales growth and price jointly explain 70% Fluctuation</a:t>
+            </a:r>
+          </a:p>
+        </p:txBody>
+      </p:sp>
+      <p:sp>
+        <p:nvSpPr>
+          <p:cNvPr id="66" name="key insights-item-3">
             <a:extLst xmlns:a="http://schemas.openxmlformats.org/drawingml/2006/main">
               <a:ext uri="{FF2B5EF4-FFF2-40B4-BE49-F238E27FC236}">
                 <a16:creationId xmlns:a16="http://schemas.microsoft.com/office/drawing/2014/main" id="{0A150743-032F-4EAE-A44E-8204041826CD}"/>
@@ -4145,7 +4145,7 @@
                   <a:srgbClr val="172033"/>
                 </a:solidFill>
               </a:rPr>
-              <a:t>后六项单项影响均低于 15%</a:t>
+              <a:t>The individual impacts of the last six items are all lower than 15%</a:t>
             </a:r>
           </a:p>
         </p:txBody>
@@ -4201,7 +4201,7 @@
                   <a:srgbClr val="15375F"/>
                 </a:solidFill>
               </a:rPr>
-              <a:t>管控动作：销售负责价格实现率，运营负责销量转化</a:t>
+              <a:t>Management and control actions: Sales is responsible for price realization rate, operations is responsible for sales conversion</a:t>
             </a:r>
           </a:p>
         </p:txBody>
